--- a/analyses-project/guidance/W6_Paragraphs_that_argue.pptx
+++ b/analyses-project/guidance/W6_Paragraphs_that_argue.pptx
@@ -9145,7 +9145,7 @@
                 <a:ea typeface="Calibri" pitchFamily="34" charset="-122"/>
                 <a:cs typeface="Calibri" pitchFamily="34" charset="-120"/>
               </a:rPr>
-              <a:t>It maps onto the handbook's pattern: </a:t>
+              <a:t>It maps onto the Student Guide's pattern: </a:t>
             </a:r>
             <a:r>
               <a:rPr lang="en-US" sz="1400" b="1" dirty="0">
@@ -12013,7 +12013,7 @@
                 <a:ea typeface="Calibri" pitchFamily="34" charset="-122"/>
                 <a:cs typeface="Calibri" pitchFamily="34" charset="-120"/>
               </a:rPr>
-              <a:t>Builds on handbook §8 ‘Reporting numbers well’; Schultz (2009) §10.3.2 Numbers and units.</a:t>
+              <a:t>Builds on Student Guide §6 ‘Reporting numbers’; Schultz (2009) §10.3.2 Numbers and units.</a:t>
             </a:r>
             <a:endParaRPr lang="en-US" sz="900" dirty="0"/>
           </a:p>
